--- a/docs/sharing/ai-native-arke-architecture-banner.pptx
+++ b/docs/sharing/ai-native-arke-architecture-banner.pptx
@@ -3140,7 +3140,7 @@
         <p:spPr>
           <a:xfrm>
             <a:off x="0" y="0"/>
-            <a:ext cx="5429250" cy="19050"/>
+            <a:ext cx="5429250" cy="14287"/>
           </a:xfrm>
           <a:prstGeom prst="rect">
             <a:avLst/>
@@ -3182,8 +3182,8 @@
         </p:nvSpPr>
         <p:spPr>
           <a:xfrm>
-            <a:off x="0" y="1123950"/>
-            <a:ext cx="5429250" cy="19050"/>
+            <a:off x="0" y="1128713"/>
+            <a:ext cx="5429250" cy="14287"/>
           </a:xfrm>
           <a:prstGeom prst="rect">
             <a:avLst/>
@@ -3225,8 +3225,8 @@
         </p:nvSpPr>
         <p:spPr>
           <a:xfrm>
-            <a:off x="76200" y="47625"/>
-            <a:ext cx="3619500" cy="133350"/>
+            <a:off x="76200" y="38100"/>
+            <a:ext cx="3619500" cy="123825"/>
           </a:xfrm>
           <a:prstGeom prst="rect">
             <a:avLst/>
@@ -3243,7 +3243,7 @@
             <a:r>
               <a:rPr sz="700" b="1" i="0">
                 <a:solidFill>
-                  <a:srgbClr val="38D1B8"/>
+                  <a:srgbClr val="7AB8FF"/>
                 </a:solidFill>
                 <a:latin typeface="Consolas"/>
               </a:rPr>
@@ -3260,8 +3260,8 @@
         </p:nvSpPr>
         <p:spPr>
           <a:xfrm>
-            <a:off x="3429000" y="47625"/>
-            <a:ext cx="1924050" cy="133350"/>
+            <a:off x="3429000" y="38100"/>
+            <a:ext cx="1924050" cy="123825"/>
           </a:xfrm>
           <a:prstGeom prst="rect">
             <a:avLst/>
@@ -3282,34 +3282,30 @@
                 </a:solidFill>
                 <a:latin typeface="Consolas"/>
               </a:rPr>
-              <a:t>让 LLM 写 kernel · 让编译器把关数学</a:t>
-            </a:r>
-          </a:p>
-        </p:txBody>
-      </p:sp>
-      <p:sp>
-        <p:nvSpPr>
-          <p:cNvPr id="7" name="Rounded Rectangle 6"/>
+              <a:t>LLM 做决策 · 编译器把关数学</a:t>
+            </a:r>
+          </a:p>
+        </p:txBody>
+      </p:sp>
+      <p:sp>
+        <p:nvSpPr>
+          <p:cNvPr id="7" name="Rectangle 6"/>
           <p:cNvSpPr/>
           <p:nvPr/>
         </p:nvSpPr>
         <p:spPr>
           <a:xfrm>
-            <a:off x="57150" y="247650"/>
-            <a:ext cx="666750" cy="571500"/>
-          </a:xfrm>
-          <a:prstGeom prst="roundRect">
-            <a:avLst>
-              <a:gd name="adj" fmla="val 18000"/>
-            </a:avLst>
+            <a:off x="1143000" y="219075"/>
+            <a:ext cx="3143250" cy="19050"/>
+          </a:xfrm>
+          <a:prstGeom prst="rect">
+            <a:avLst/>
           </a:prstGeom>
           <a:solidFill>
-            <a:srgbClr val="183553"/>
+            <a:srgbClr val="F2C55C"/>
           </a:solidFill>
-          <a:ln w="9525">
-            <a:solidFill>
-              <a:srgbClr val="EF6E6E"/>
-            </a:solidFill>
+          <a:ln>
+            <a:noFill/>
           </a:ln>
         </p:spPr>
         <p:style>
@@ -3336,20 +3332,20 @@
       </p:sp>
       <p:sp>
         <p:nvSpPr>
-          <p:cNvPr id="8" name="Rectangle 7"/>
+          <p:cNvPr id="8" name="Left Arrow 7"/>
           <p:cNvSpPr/>
           <p:nvPr/>
         </p:nvSpPr>
         <p:spPr>
           <a:xfrm>
-            <a:off x="57150" y="247650"/>
-            <a:ext cx="28575" cy="571500"/>
-          </a:xfrm>
-          <a:prstGeom prst="rect">
+            <a:off x="1066800" y="190500"/>
+            <a:ext cx="95250" cy="76200"/>
+          </a:xfrm>
+          <a:prstGeom prst="leftArrow">
             <a:avLst/>
           </a:prstGeom>
           <a:solidFill>
-            <a:srgbClr val="EF6E6E"/>
+            <a:srgbClr val="F2C55C"/>
           </a:solidFill>
           <a:ln>
             <a:noFill/>
@@ -3385,8 +3381,8 @@
         </p:nvSpPr>
         <p:spPr>
           <a:xfrm>
-            <a:off x="95250" y="276225"/>
-            <a:ext cx="133350" cy="133350"/>
+            <a:off x="1333500" y="171450"/>
+            <a:ext cx="2762250" cy="104775"/>
           </a:xfrm>
           <a:prstGeom prst="rect">
             <a:avLst/>
@@ -3394,114 +3390,47 @@
           <a:noFill/>
         </p:spPr>
         <p:txBody>
-          <a:bodyPr wrap="square" lIns="0" rIns="0" tIns="0" bIns="0" anchor="t">
+          <a:bodyPr wrap="square" lIns="0" rIns="0" tIns="0" bIns="0" anchor="ctr">
             <a:spAutoFit/>
           </a:bodyPr>
           <a:lstStyle/>
           <a:p>
-            <a:pPr algn="l"/>
-            <a:r>
-              <a:rPr sz="900" b="1" i="0">
+            <a:pPr algn="ctr"/>
+            <a:r>
+              <a:rPr sz="550" b="0" i="1">
                 <a:solidFill>
-                  <a:srgbClr val="EF6E6E"/>
+                  <a:srgbClr val="F2C55C"/>
                 </a:solidFill>
                 <a:latin typeface="Consolas"/>
               </a:rPr>
-              <a:t>⎘</a:t>
-            </a:r>
-          </a:p>
-        </p:txBody>
-      </p:sp>
-      <p:sp>
-        <p:nvSpPr>
-          <p:cNvPr id="10" name="TextBox 9"/>
-          <p:cNvSpPr txBox="1"/>
-          <p:nvPr/>
-        </p:nvSpPr>
-        <p:spPr>
-          <a:xfrm>
-            <a:off x="95250" y="276225"/>
-            <a:ext cx="590550" cy="133350"/>
-          </a:xfrm>
-          <a:prstGeom prst="rect">
-            <a:avLst/>
-          </a:prstGeom>
-          <a:noFill/>
-        </p:spPr>
-        <p:txBody>
-          <a:bodyPr wrap="square" lIns="0" rIns="0" tIns="0" bIns="0" anchor="t">
-            <a:spAutoFit/>
-          </a:bodyPr>
-          <a:lstStyle/>
-          <a:p>
-            <a:pPr algn="r"/>
-            <a:r>
-              <a:rPr sz="650" b="1" i="0">
-                <a:solidFill>
-                  <a:srgbClr val="EF6E6E"/>
-                </a:solidFill>
-                <a:latin typeface="Microsoft YaHei"/>
-              </a:rPr>
-              <a:t>User / Agent</a:t>
-            </a:r>
-          </a:p>
-        </p:txBody>
-      </p:sp>
-      <p:sp>
-        <p:nvSpPr>
-          <p:cNvPr id="11" name="TextBox 10"/>
-          <p:cNvSpPr txBox="1"/>
-          <p:nvPr/>
-        </p:nvSpPr>
-        <p:spPr>
-          <a:xfrm>
-            <a:off x="95250" y="438150"/>
-            <a:ext cx="590550" cy="361950"/>
-          </a:xfrm>
-          <a:prstGeom prst="rect">
-            <a:avLst/>
-          </a:prstGeom>
-          <a:noFill/>
-        </p:spPr>
-        <p:txBody>
-          <a:bodyPr wrap="square" lIns="0" rIns="0" tIns="0" bIns="0" anchor="t">
-            <a:spAutoFit/>
-          </a:bodyPr>
-          <a:lstStyle/>
-          <a:p>
-            <a:pPr algn="l"/>
-            <a:r>
-              <a:rPr sz="550" b="0" i="0">
-                <a:solidFill>
-                  <a:srgbClr val="9FB5C9"/>
-                </a:solidFill>
-                <a:latin typeface="Consolas"/>
-              </a:rPr>
-              <a:t>kernel semantics
-+ optimization intent</a:t>
-            </a:r>
-          </a:p>
-        </p:txBody>
-      </p:sp>
-      <p:sp>
-        <p:nvSpPr>
-          <p:cNvPr id="12" name="Right Arrow 11"/>
+              <a:t>feedback loop  ·  legal actions  ·  hw signal (profile / roofline)  ·  gate verdict</a:t>
+            </a:r>
+          </a:p>
+        </p:txBody>
+      </p:sp>
+      <p:sp>
+        <p:nvSpPr>
+          <p:cNvPr id="10" name="Rounded Rectangle 9"/>
           <p:cNvSpPr/>
           <p:nvPr/>
         </p:nvSpPr>
         <p:spPr>
           <a:xfrm>
-            <a:off x="723900" y="495300"/>
-            <a:ext cx="76200" cy="76200"/>
-          </a:xfrm>
-          <a:prstGeom prst="rightArrow">
-            <a:avLst/>
+            <a:off x="57150" y="304800"/>
+            <a:ext cx="1257300" cy="571500"/>
+          </a:xfrm>
+          <a:prstGeom prst="roundRect">
+            <a:avLst>
+              <a:gd name="adj" fmla="val 16000"/>
+            </a:avLst>
           </a:prstGeom>
           <a:solidFill>
-            <a:srgbClr val="9FB5C9"/>
+            <a:srgbClr val="183553"/>
           </a:solidFill>
-          <a:ln>
-            <a:noFill/>
+          <a:ln w="11430">
+            <a:solidFill>
+              <a:srgbClr val="7AB8FF"/>
+            </a:solidFill>
           </a:ln>
         </p:spPr>
         <p:style>
@@ -3528,27 +3457,23 @@
       </p:sp>
       <p:sp>
         <p:nvSpPr>
-          <p:cNvPr id="13" name="Rounded Rectangle 12"/>
+          <p:cNvPr id="11" name="Rectangle 10"/>
           <p:cNvSpPr/>
           <p:nvPr/>
         </p:nvSpPr>
         <p:spPr>
           <a:xfrm>
-            <a:off x="800100" y="247650"/>
-            <a:ext cx="723900" cy="571500"/>
-          </a:xfrm>
-          <a:prstGeom prst="roundRect">
-            <a:avLst>
-              <a:gd name="adj" fmla="val 18000"/>
-            </a:avLst>
+            <a:off x="57150" y="304800"/>
+            <a:ext cx="28575" cy="571500"/>
+          </a:xfrm>
+          <a:prstGeom prst="rect">
+            <a:avLst/>
           </a:prstGeom>
           <a:solidFill>
-            <a:srgbClr val="122A43"/>
+            <a:srgbClr val="7AB8FF"/>
           </a:solidFill>
-          <a:ln w="9525">
-            <a:solidFill>
-              <a:srgbClr val="38D1B8"/>
-            </a:solidFill>
+          <a:ln>
+            <a:noFill/>
           </a:ln>
         </p:spPr>
         <p:style>
@@ -3575,20 +3500,160 @@
       </p:sp>
       <p:sp>
         <p:nvSpPr>
-          <p:cNvPr id="14" name="Rectangle 13"/>
-          <p:cNvSpPr/>
+          <p:cNvPr id="12" name="TextBox 11"/>
+          <p:cNvSpPr txBox="1"/>
           <p:nvPr/>
         </p:nvSpPr>
         <p:spPr>
           <a:xfrm>
-            <a:off x="800100" y="247650"/>
-            <a:ext cx="28575" cy="571500"/>
+            <a:off x="114300" y="333375"/>
+            <a:ext cx="152400" cy="133350"/>
           </a:xfrm>
           <a:prstGeom prst="rect">
             <a:avLst/>
           </a:prstGeom>
+          <a:noFill/>
+        </p:spPr>
+        <p:txBody>
+          <a:bodyPr wrap="square" lIns="0" rIns="0" tIns="0" bIns="0" anchor="t">
+            <a:spAutoFit/>
+          </a:bodyPr>
+          <a:lstStyle/>
+          <a:p>
+            <a:pPr algn="l"/>
+            <a:r>
+              <a:rPr sz="1000" b="1" i="0">
+                <a:solidFill>
+                  <a:srgbClr val="7AB8FF"/>
+                </a:solidFill>
+                <a:latin typeface="Consolas"/>
+              </a:rPr>
+              <a:t>①</a:t>
+            </a:r>
+          </a:p>
+        </p:txBody>
+      </p:sp>
+      <p:sp>
+        <p:nvSpPr>
+          <p:cNvPr id="13" name="TextBox 12"/>
+          <p:cNvSpPr txBox="1"/>
+          <p:nvPr/>
+        </p:nvSpPr>
+        <p:spPr>
+          <a:xfrm>
+            <a:off x="114300" y="342900"/>
+            <a:ext cx="1143000" cy="142875"/>
+          </a:xfrm>
+          <a:prstGeom prst="rect">
+            <a:avLst/>
+          </a:prstGeom>
+          <a:noFill/>
+        </p:spPr>
+        <p:txBody>
+          <a:bodyPr wrap="square" lIns="0" rIns="0" tIns="0" bIns="0" anchor="t">
+            <a:spAutoFit/>
+          </a:bodyPr>
+          <a:lstStyle/>
+          <a:p>
+            <a:pPr algn="r"/>
+            <a:r>
+              <a:rPr sz="800" b="1" i="0">
+                <a:solidFill>
+                  <a:srgbClr val="7AB8FF"/>
+                </a:solidFill>
+                <a:latin typeface="Microsoft YaHei"/>
+              </a:rPr>
+              <a:t>LLM as Decider</a:t>
+            </a:r>
+          </a:p>
+        </p:txBody>
+      </p:sp>
+      <p:sp>
+        <p:nvSpPr>
+          <p:cNvPr id="14" name="TextBox 13"/>
+          <p:cNvSpPr txBox="1"/>
+          <p:nvPr/>
+        </p:nvSpPr>
+        <p:spPr>
+          <a:xfrm>
+            <a:off x="133350" y="514350"/>
+            <a:ext cx="1123950" cy="133350"/>
+          </a:xfrm>
+          <a:prstGeom prst="rect">
+            <a:avLst/>
+          </a:prstGeom>
+          <a:noFill/>
+        </p:spPr>
+        <p:txBody>
+          <a:bodyPr wrap="square" lIns="0" rIns="0" tIns="0" bIns="0" anchor="ctr">
+            <a:spAutoFit/>
+          </a:bodyPr>
+          <a:lstStyle/>
+          <a:p>
+            <a:pPr algn="ctr"/>
+            <a:r>
+              <a:rPr sz="600" b="1" i="0">
+                <a:solidFill>
+                  <a:srgbClr val="EAF2FA"/>
+                </a:solidFill>
+                <a:latin typeface="Consolas"/>
+              </a:rPr>
+              <a:t>决策 / 推理 / 反思</a:t>
+            </a:r>
+          </a:p>
+        </p:txBody>
+      </p:sp>
+      <p:sp>
+        <p:nvSpPr>
+          <p:cNvPr id="15" name="TextBox 14"/>
+          <p:cNvSpPr txBox="1"/>
+          <p:nvPr/>
+        </p:nvSpPr>
+        <p:spPr>
+          <a:xfrm>
+            <a:off x="133350" y="647700"/>
+            <a:ext cx="1123950" cy="190500"/>
+          </a:xfrm>
+          <a:prstGeom prst="rect">
+            <a:avLst/>
+          </a:prstGeom>
+          <a:noFill/>
+        </p:spPr>
+        <p:txBody>
+          <a:bodyPr wrap="square" lIns="0" rIns="0" tIns="0" bIns="0" anchor="ctr">
+            <a:spAutoFit/>
+          </a:bodyPr>
+          <a:lstStyle/>
+          <a:p>
+            <a:pPr algn="ctr"/>
+            <a:r>
+              <a:rPr sz="550" b="0" i="0">
+                <a:solidFill>
+                  <a:srgbClr val="9FB5C9"/>
+                </a:solidFill>
+                <a:latin typeface="Consolas"/>
+              </a:rPr>
+              <a:t>NOT a code generator</a:t>
+            </a:r>
+          </a:p>
+        </p:txBody>
+      </p:sp>
+      <p:sp>
+        <p:nvSpPr>
+          <p:cNvPr id="16" name="Right Arrow 15"/>
+          <p:cNvSpPr/>
+          <p:nvPr/>
+        </p:nvSpPr>
+        <p:spPr>
+          <a:xfrm>
+            <a:off x="1314450" y="542925"/>
+            <a:ext cx="95250" cy="95250"/>
+          </a:xfrm>
+          <a:prstGeom prst="rightArrow">
+            <a:avLst/>
+          </a:prstGeom>
           <a:solidFill>
-            <a:srgbClr val="38D1B8"/>
+            <a:srgbClr val="9FB5C9"/>
           </a:solidFill>
           <a:ln>
             <a:noFill/>
@@ -3618,128 +3683,27 @@
       </p:sp>
       <p:sp>
         <p:nvSpPr>
-          <p:cNvPr id="15" name="TextBox 14"/>
-          <p:cNvSpPr txBox="1"/>
-          <p:nvPr/>
-        </p:nvSpPr>
-        <p:spPr>
-          <a:xfrm>
-            <a:off x="838200" y="276225"/>
-            <a:ext cx="133350" cy="133350"/>
-          </a:xfrm>
-          <a:prstGeom prst="rect">
-            <a:avLst/>
-          </a:prstGeom>
-          <a:noFill/>
-        </p:spPr>
-        <p:txBody>
-          <a:bodyPr wrap="square" lIns="0" rIns="0" tIns="0" bIns="0" anchor="t">
-            <a:spAutoFit/>
-          </a:bodyPr>
-          <a:lstStyle/>
-          <a:p>
-            <a:pPr algn="l"/>
-            <a:r>
-              <a:rPr sz="900" b="1" i="0">
-                <a:solidFill>
-                  <a:srgbClr val="38D1B8"/>
-                </a:solidFill>
-                <a:latin typeface="Consolas"/>
-              </a:rPr>
-              <a:t>①</a:t>
-            </a:r>
-          </a:p>
-        </p:txBody>
-      </p:sp>
-      <p:sp>
-        <p:nvSpPr>
-          <p:cNvPr id="16" name="TextBox 15"/>
-          <p:cNvSpPr txBox="1"/>
-          <p:nvPr/>
-        </p:nvSpPr>
-        <p:spPr>
-          <a:xfrm>
-            <a:off x="838200" y="276225"/>
-            <a:ext cx="647700" cy="133350"/>
-          </a:xfrm>
-          <a:prstGeom prst="rect">
-            <a:avLst/>
-          </a:prstGeom>
-          <a:noFill/>
-        </p:spPr>
-        <p:txBody>
-          <a:bodyPr wrap="square" lIns="0" rIns="0" tIns="0" bIns="0" anchor="t">
-            <a:spAutoFit/>
-          </a:bodyPr>
-          <a:lstStyle/>
-          <a:p>
-            <a:pPr algn="r"/>
-            <a:r>
-              <a:rPr sz="650" b="1" i="0">
-                <a:solidFill>
-                  <a:srgbClr val="38D1B8"/>
-                </a:solidFill>
-                <a:latin typeface="Microsoft YaHei"/>
-              </a:rPr>
-              <a:t>Arke Language</a:t>
-            </a:r>
-          </a:p>
-        </p:txBody>
-      </p:sp>
-      <p:sp>
-        <p:nvSpPr>
-          <p:cNvPr id="17" name="TextBox 16"/>
-          <p:cNvSpPr txBox="1"/>
-          <p:nvPr/>
-        </p:nvSpPr>
-        <p:spPr>
-          <a:xfrm>
-            <a:off x="838200" y="438150"/>
-            <a:ext cx="647700" cy="361950"/>
-          </a:xfrm>
-          <a:prstGeom prst="rect">
-            <a:avLst/>
-          </a:prstGeom>
-          <a:noFill/>
-        </p:spPr>
-        <p:txBody>
-          <a:bodyPr wrap="square" lIns="0" rIns="0" tIns="0" bIns="0" anchor="t">
-            <a:spAutoFit/>
-          </a:bodyPr>
-          <a:lstStyle/>
-          <a:p>
-            <a:pPr algn="l"/>
-            <a:r>
-              <a:rPr sz="550" b="0" i="0">
-                <a:solidFill>
-                  <a:srgbClr val="9FB5C9"/>
-                </a:solidFill>
-                <a:latin typeface="Consolas"/>
-              </a:rPr>
-              <a:t>.ak  ·  kernel { } + strategy { }</a:t>
-            </a:r>
-          </a:p>
-        </p:txBody>
-      </p:sp>
-      <p:sp>
-        <p:nvSpPr>
-          <p:cNvPr id="18" name="Right Arrow 17"/>
+          <p:cNvPr id="17" name="Rounded Rectangle 16"/>
           <p:cNvSpPr/>
           <p:nvPr/>
         </p:nvSpPr>
         <p:spPr>
           <a:xfrm>
-            <a:off x="1524000" y="495300"/>
-            <a:ext cx="76200" cy="76200"/>
-          </a:xfrm>
-          <a:prstGeom prst="rightArrow">
-            <a:avLst/>
+            <a:off x="1409700" y="304800"/>
+            <a:ext cx="1257300" cy="571500"/>
+          </a:xfrm>
+          <a:prstGeom prst="roundRect">
+            <a:avLst>
+              <a:gd name="adj" fmla="val 16000"/>
+            </a:avLst>
           </a:prstGeom>
           <a:solidFill>
-            <a:srgbClr val="9FB5C9"/>
+            <a:srgbClr val="122A43"/>
           </a:solidFill>
-          <a:ln>
-            <a:noFill/>
+          <a:ln w="11430">
+            <a:solidFill>
+              <a:srgbClr val="38D1B8"/>
+            </a:solidFill>
           </a:ln>
         </p:spPr>
         <p:style>
@@ -3766,27 +3730,23 @@
       </p:sp>
       <p:sp>
         <p:nvSpPr>
-          <p:cNvPr id="19" name="Rounded Rectangle 18"/>
+          <p:cNvPr id="18" name="Rectangle 17"/>
           <p:cNvSpPr/>
           <p:nvPr/>
         </p:nvSpPr>
         <p:spPr>
           <a:xfrm>
-            <a:off x="1600200" y="247650"/>
-            <a:ext cx="723900" cy="571500"/>
-          </a:xfrm>
-          <a:prstGeom prst="roundRect">
-            <a:avLst>
-              <a:gd name="adj" fmla="val 18000"/>
-            </a:avLst>
+            <a:off x="1409700" y="304800"/>
+            <a:ext cx="28575" cy="571500"/>
+          </a:xfrm>
+          <a:prstGeom prst="rect">
+            <a:avLst/>
           </a:prstGeom>
           <a:solidFill>
-            <a:srgbClr val="122A43"/>
+            <a:srgbClr val="38D1B8"/>
           </a:solidFill>
-          <a:ln w="9525">
-            <a:solidFill>
-              <a:srgbClr val="7AB8FF"/>
-            </a:solidFill>
+          <a:ln>
+            <a:noFill/>
           </a:ln>
         </p:spPr>
         <p:style>
@@ -3813,20 +3773,160 @@
       </p:sp>
       <p:sp>
         <p:nvSpPr>
-          <p:cNvPr id="20" name="Rectangle 19"/>
-          <p:cNvSpPr/>
+          <p:cNvPr id="19" name="TextBox 18"/>
+          <p:cNvSpPr txBox="1"/>
           <p:nvPr/>
         </p:nvSpPr>
         <p:spPr>
           <a:xfrm>
-            <a:off x="1600200" y="247650"/>
-            <a:ext cx="28575" cy="571500"/>
+            <a:off x="1466850" y="333375"/>
+            <a:ext cx="152400" cy="133350"/>
           </a:xfrm>
           <a:prstGeom prst="rect">
             <a:avLst/>
           </a:prstGeom>
+          <a:noFill/>
+        </p:spPr>
+        <p:txBody>
+          <a:bodyPr wrap="square" lIns="0" rIns="0" tIns="0" bIns="0" anchor="t">
+            <a:spAutoFit/>
+          </a:bodyPr>
+          <a:lstStyle/>
+          <a:p>
+            <a:pPr algn="l"/>
+            <a:r>
+              <a:rPr sz="1000" b="1" i="0">
+                <a:solidFill>
+                  <a:srgbClr val="38D1B8"/>
+                </a:solidFill>
+                <a:latin typeface="Consolas"/>
+              </a:rPr>
+              <a:t>②</a:t>
+            </a:r>
+          </a:p>
+        </p:txBody>
+      </p:sp>
+      <p:sp>
+        <p:nvSpPr>
+          <p:cNvPr id="20" name="TextBox 19"/>
+          <p:cNvSpPr txBox="1"/>
+          <p:nvPr/>
+        </p:nvSpPr>
+        <p:spPr>
+          <a:xfrm>
+            <a:off x="1466850" y="342900"/>
+            <a:ext cx="1143000" cy="142875"/>
+          </a:xfrm>
+          <a:prstGeom prst="rect">
+            <a:avLst/>
+          </a:prstGeom>
+          <a:noFill/>
+        </p:spPr>
+        <p:txBody>
+          <a:bodyPr wrap="square" lIns="0" rIns="0" tIns="0" bIns="0" anchor="t">
+            <a:spAutoFit/>
+          </a:bodyPr>
+          <a:lstStyle/>
+          <a:p>
+            <a:pPr algn="r"/>
+            <a:r>
+              <a:rPr sz="800" b="1" i="0">
+                <a:solidFill>
+                  <a:srgbClr val="38D1B8"/>
+                </a:solidFill>
+                <a:latin typeface="Microsoft YaHei"/>
+              </a:rPr>
+              <a:t>Arke Lang + IR</a:t>
+            </a:r>
+          </a:p>
+        </p:txBody>
+      </p:sp>
+      <p:sp>
+        <p:nvSpPr>
+          <p:cNvPr id="21" name="TextBox 20"/>
+          <p:cNvSpPr txBox="1"/>
+          <p:nvPr/>
+        </p:nvSpPr>
+        <p:spPr>
+          <a:xfrm>
+            <a:off x="1485900" y="514350"/>
+            <a:ext cx="1123950" cy="133350"/>
+          </a:xfrm>
+          <a:prstGeom prst="rect">
+            <a:avLst/>
+          </a:prstGeom>
+          <a:noFill/>
+        </p:spPr>
+        <p:txBody>
+          <a:bodyPr wrap="square" lIns="0" rIns="0" tIns="0" bIns="0" anchor="ctr">
+            <a:spAutoFit/>
+          </a:bodyPr>
+          <a:lstStyle/>
+          <a:p>
+            <a:pPr algn="ctr"/>
+            <a:r>
+              <a:rPr sz="600" b="1" i="0">
+                <a:solidFill>
+                  <a:srgbClr val="EAF2FA"/>
+                </a:solidFill>
+                <a:latin typeface="Consolas"/>
+              </a:rPr>
+              <a:t>语义 / 策略分离  ·  rationale</a:t>
+            </a:r>
+          </a:p>
+        </p:txBody>
+      </p:sp>
+      <p:sp>
+        <p:nvSpPr>
+          <p:cNvPr id="22" name="TextBox 21"/>
+          <p:cNvSpPr txBox="1"/>
+          <p:nvPr/>
+        </p:nvSpPr>
+        <p:spPr>
+          <a:xfrm>
+            <a:off x="1485900" y="647700"/>
+            <a:ext cx="1123950" cy="190500"/>
+          </a:xfrm>
+          <a:prstGeom prst="rect">
+            <a:avLst/>
+          </a:prstGeom>
+          <a:noFill/>
+        </p:spPr>
+        <p:txBody>
+          <a:bodyPr wrap="square" lIns="0" rIns="0" tIns="0" bIns="0" anchor="ctr">
+            <a:spAutoFit/>
+          </a:bodyPr>
+          <a:lstStyle/>
+          <a:p>
+            <a:pPr algn="ctr"/>
+            <a:r>
+              <a:rPr sz="550" b="0" i="0">
+                <a:solidFill>
+                  <a:srgbClr val="9FB5C9"/>
+                </a:solidFill>
+                <a:latin typeface="Consolas"/>
+              </a:rPr>
+              <a:t>结构化 · 有界动作空间</a:t>
+            </a:r>
+          </a:p>
+        </p:txBody>
+      </p:sp>
+      <p:sp>
+        <p:nvSpPr>
+          <p:cNvPr id="23" name="Right Arrow 22"/>
+          <p:cNvSpPr/>
+          <p:nvPr/>
+        </p:nvSpPr>
+        <p:spPr>
+          <a:xfrm>
+            <a:off x="2667000" y="542925"/>
+            <a:ext cx="95250" cy="95250"/>
+          </a:xfrm>
+          <a:prstGeom prst="rightArrow">
+            <a:avLst/>
+          </a:prstGeom>
           <a:solidFill>
-            <a:srgbClr val="7AB8FF"/>
+            <a:srgbClr val="9FB5C9"/>
           </a:solidFill>
           <a:ln>
             <a:noFill/>
@@ -3856,129 +3956,27 @@
       </p:sp>
       <p:sp>
         <p:nvSpPr>
-          <p:cNvPr id="21" name="TextBox 20"/>
-          <p:cNvSpPr txBox="1"/>
-          <p:nvPr/>
-        </p:nvSpPr>
-        <p:spPr>
-          <a:xfrm>
-            <a:off x="1638300" y="276225"/>
-            <a:ext cx="133350" cy="133350"/>
-          </a:xfrm>
-          <a:prstGeom prst="rect">
-            <a:avLst/>
-          </a:prstGeom>
-          <a:noFill/>
-        </p:spPr>
-        <p:txBody>
-          <a:bodyPr wrap="square" lIns="0" rIns="0" tIns="0" bIns="0" anchor="t">
-            <a:spAutoFit/>
-          </a:bodyPr>
-          <a:lstStyle/>
-          <a:p>
-            <a:pPr algn="l"/>
-            <a:r>
-              <a:rPr sz="900" b="1" i="0">
-                <a:solidFill>
-                  <a:srgbClr val="7AB8FF"/>
-                </a:solidFill>
-                <a:latin typeface="Consolas"/>
-              </a:rPr>
-              <a:t>②</a:t>
-            </a:r>
-          </a:p>
-        </p:txBody>
-      </p:sp>
-      <p:sp>
-        <p:nvSpPr>
-          <p:cNvPr id="22" name="TextBox 21"/>
-          <p:cNvSpPr txBox="1"/>
-          <p:nvPr/>
-        </p:nvSpPr>
-        <p:spPr>
-          <a:xfrm>
-            <a:off x="1638300" y="276225"/>
-            <a:ext cx="647700" cy="133350"/>
-          </a:xfrm>
-          <a:prstGeom prst="rect">
-            <a:avLst/>
-          </a:prstGeom>
-          <a:noFill/>
-        </p:spPr>
-        <p:txBody>
-          <a:bodyPr wrap="square" lIns="0" rIns="0" tIns="0" bIns="0" anchor="t">
-            <a:spAutoFit/>
-          </a:bodyPr>
-          <a:lstStyle/>
-          <a:p>
-            <a:pPr algn="r"/>
-            <a:r>
-              <a:rPr sz="650" b="1" i="0">
-                <a:solidFill>
-                  <a:srgbClr val="7AB8FF"/>
-                </a:solidFill>
-                <a:latin typeface="Microsoft YaHei"/>
-              </a:rPr>
-              <a:t>Multi-Layer IR</a:t>
-            </a:r>
-          </a:p>
-        </p:txBody>
-      </p:sp>
-      <p:sp>
-        <p:nvSpPr>
-          <p:cNvPr id="23" name="TextBox 22"/>
-          <p:cNvSpPr txBox="1"/>
-          <p:nvPr/>
-        </p:nvSpPr>
-        <p:spPr>
-          <a:xfrm>
-            <a:off x="1638300" y="438150"/>
-            <a:ext cx="647700" cy="361950"/>
-          </a:xfrm>
-          <a:prstGeom prst="rect">
-            <a:avLst/>
-          </a:prstGeom>
-          <a:noFill/>
-        </p:spPr>
-        <p:txBody>
-          <a:bodyPr wrap="square" lIns="0" rIns="0" tIns="0" bIns="0" anchor="t">
-            <a:spAutoFit/>
-          </a:bodyPr>
-          <a:lstStyle/>
-          <a:p>
-            <a:pPr algn="l"/>
-            <a:r>
-              <a:rPr sz="550" b="0" i="0">
-                <a:solidFill>
-                  <a:srgbClr val="9FB5C9"/>
-                </a:solidFill>
-                <a:latin typeface="Consolas"/>
-              </a:rPr>
-              <a:t>Semantic · Strategy ·
-Schedule · Instruction</a:t>
-            </a:r>
-          </a:p>
-        </p:txBody>
-      </p:sp>
-      <p:sp>
-        <p:nvSpPr>
-          <p:cNvPr id="24" name="Right Arrow 23"/>
+          <p:cNvPr id="24" name="Rounded Rectangle 23"/>
           <p:cNvSpPr/>
           <p:nvPr/>
         </p:nvSpPr>
         <p:spPr>
           <a:xfrm>
-            <a:off x="2324100" y="495300"/>
-            <a:ext cx="76200" cy="76200"/>
-          </a:xfrm>
-          <a:prstGeom prst="rightArrow">
-            <a:avLst/>
+            <a:off x="2762250" y="304800"/>
+            <a:ext cx="1257300" cy="571500"/>
+          </a:xfrm>
+          <a:prstGeom prst="roundRect">
+            <a:avLst>
+              <a:gd name="adj" fmla="val 16000"/>
+            </a:avLst>
           </a:prstGeom>
           <a:solidFill>
-            <a:srgbClr val="9FB5C9"/>
+            <a:srgbClr val="122A43"/>
           </a:solidFill>
-          <a:ln>
-            <a:noFill/>
+          <a:ln w="11430">
+            <a:solidFill>
+              <a:srgbClr val="F2C55C"/>
+            </a:solidFill>
           </a:ln>
         </p:spPr>
         <p:style>
@@ -4005,27 +4003,23 @@
       </p:sp>
       <p:sp>
         <p:nvSpPr>
-          <p:cNvPr id="25" name="Rounded Rectangle 24"/>
+          <p:cNvPr id="25" name="Rectangle 24"/>
           <p:cNvSpPr/>
           <p:nvPr/>
         </p:nvSpPr>
         <p:spPr>
           <a:xfrm>
-            <a:off x="2400300" y="247650"/>
-            <a:ext cx="723900" cy="571500"/>
-          </a:xfrm>
-          <a:prstGeom prst="roundRect">
-            <a:avLst>
-              <a:gd name="adj" fmla="val 18000"/>
-            </a:avLst>
+            <a:off x="2762250" y="304800"/>
+            <a:ext cx="28575" cy="571500"/>
+          </a:xfrm>
+          <a:prstGeom prst="rect">
+            <a:avLst/>
           </a:prstGeom>
           <a:solidFill>
-            <a:srgbClr val="122A43"/>
+            <a:srgbClr val="F2C55C"/>
           </a:solidFill>
-          <a:ln w="9525">
-            <a:solidFill>
-              <a:srgbClr val="F2C55C"/>
-            </a:solidFill>
+          <a:ln>
+            <a:noFill/>
           </a:ln>
         </p:spPr>
         <p:style>
@@ -4052,20 +4046,160 @@
       </p:sp>
       <p:sp>
         <p:nvSpPr>
-          <p:cNvPr id="26" name="Rectangle 25"/>
-          <p:cNvSpPr/>
+          <p:cNvPr id="26" name="TextBox 25"/>
+          <p:cNvSpPr txBox="1"/>
           <p:nvPr/>
         </p:nvSpPr>
         <p:spPr>
           <a:xfrm>
-            <a:off x="2400300" y="247650"/>
-            <a:ext cx="28575" cy="571500"/>
+            <a:off x="2819400" y="333375"/>
+            <a:ext cx="152400" cy="133350"/>
           </a:xfrm>
           <a:prstGeom prst="rect">
             <a:avLst/>
           </a:prstGeom>
+          <a:noFill/>
+        </p:spPr>
+        <p:txBody>
+          <a:bodyPr wrap="square" lIns="0" rIns="0" tIns="0" bIns="0" anchor="t">
+            <a:spAutoFit/>
+          </a:bodyPr>
+          <a:lstStyle/>
+          <a:p>
+            <a:pPr algn="l"/>
+            <a:r>
+              <a:rPr sz="1000" b="1" i="0">
+                <a:solidFill>
+                  <a:srgbClr val="F2C55C"/>
+                </a:solidFill>
+                <a:latin typeface="Consolas"/>
+              </a:rPr>
+              <a:t>③</a:t>
+            </a:r>
+          </a:p>
+        </p:txBody>
+      </p:sp>
+      <p:sp>
+        <p:nvSpPr>
+          <p:cNvPr id="27" name="TextBox 26"/>
+          <p:cNvSpPr txBox="1"/>
+          <p:nvPr/>
+        </p:nvSpPr>
+        <p:spPr>
+          <a:xfrm>
+            <a:off x="2819400" y="342900"/>
+            <a:ext cx="1143000" cy="142875"/>
+          </a:xfrm>
+          <a:prstGeom prst="rect">
+            <a:avLst/>
+          </a:prstGeom>
+          <a:noFill/>
+        </p:spPr>
+        <p:txBody>
+          <a:bodyPr wrap="square" lIns="0" rIns="0" tIns="0" bIns="0" anchor="t">
+            <a:spAutoFit/>
+          </a:bodyPr>
+          <a:lstStyle/>
+          <a:p>
+            <a:pPr algn="r"/>
+            <a:r>
+              <a:rPr sz="800" b="1" i="0">
+                <a:solidFill>
+                  <a:srgbClr val="F2C55C"/>
+                </a:solidFill>
+                <a:latin typeface="Microsoft YaHei"/>
+              </a:rPr>
+              <a:t>Compiler-Verifier</a:t>
+            </a:r>
+          </a:p>
+        </p:txBody>
+      </p:sp>
+      <p:sp>
+        <p:nvSpPr>
+          <p:cNvPr id="28" name="TextBox 27"/>
+          <p:cNvSpPr txBox="1"/>
+          <p:nvPr/>
+        </p:nvSpPr>
+        <p:spPr>
+          <a:xfrm>
+            <a:off x="2838450" y="514350"/>
+            <a:ext cx="1123950" cy="133350"/>
+          </a:xfrm>
+          <a:prstGeom prst="rect">
+            <a:avLst/>
+          </a:prstGeom>
+          <a:noFill/>
+        </p:spPr>
+        <p:txBody>
+          <a:bodyPr wrap="square" lIns="0" rIns="0" tIns="0" bIns="0" anchor="ctr">
+            <a:spAutoFit/>
+          </a:bodyPr>
+          <a:lstStyle/>
+          <a:p>
+            <a:pPr algn="ctr"/>
+            <a:r>
+              <a:rPr sz="600" b="1" i="0">
+                <a:solidFill>
+                  <a:srgbClr val="EAF2FA"/>
+                </a:solidFill>
+                <a:latin typeface="Consolas"/>
+              </a:rPr>
+              <a:t>静态 / 数值 / 性能 三级门禁</a:t>
+            </a:r>
+          </a:p>
+        </p:txBody>
+      </p:sp>
+      <p:sp>
+        <p:nvSpPr>
+          <p:cNvPr id="29" name="TextBox 28"/>
+          <p:cNvSpPr txBox="1"/>
+          <p:nvPr/>
+        </p:nvSpPr>
+        <p:spPr>
+          <a:xfrm>
+            <a:off x="2838450" y="647700"/>
+            <a:ext cx="1123950" cy="190500"/>
+          </a:xfrm>
+          <a:prstGeom prst="rect">
+            <a:avLst/>
+          </a:prstGeom>
+          <a:noFill/>
+        </p:spPr>
+        <p:txBody>
+          <a:bodyPr wrap="square" lIns="0" rIns="0" tIns="0" bIns="0" anchor="ctr">
+            <a:spAutoFit/>
+          </a:bodyPr>
+          <a:lstStyle/>
+          <a:p>
+            <a:pPr algn="ctr"/>
+            <a:r>
+              <a:rPr sz="550" b="0" i="0">
+                <a:solidFill>
+                  <a:srgbClr val="9FB5C9"/>
+                </a:solidFill>
+                <a:latin typeface="Consolas"/>
+              </a:rPr>
+              <a:t>checkpoint  ·  rollback</a:t>
+            </a:r>
+          </a:p>
+        </p:txBody>
+      </p:sp>
+      <p:sp>
+        <p:nvSpPr>
+          <p:cNvPr id="30" name="Right Arrow 29"/>
+          <p:cNvSpPr/>
+          <p:nvPr/>
+        </p:nvSpPr>
+        <p:spPr>
+          <a:xfrm>
+            <a:off x="4019550" y="542925"/>
+            <a:ext cx="95250" cy="95250"/>
+          </a:xfrm>
+          <a:prstGeom prst="rightArrow">
+            <a:avLst/>
+          </a:prstGeom>
           <a:solidFill>
-            <a:srgbClr val="F2C55C"/>
+            <a:srgbClr val="9FB5C9"/>
           </a:solidFill>
           <a:ln>
             <a:noFill/>
@@ -4095,129 +4229,27 @@
       </p:sp>
       <p:sp>
         <p:nvSpPr>
-          <p:cNvPr id="27" name="TextBox 26"/>
-          <p:cNvSpPr txBox="1"/>
-          <p:nvPr/>
-        </p:nvSpPr>
-        <p:spPr>
-          <a:xfrm>
-            <a:off x="2438400" y="276225"/>
-            <a:ext cx="133350" cy="133350"/>
-          </a:xfrm>
-          <a:prstGeom prst="rect">
-            <a:avLst/>
-          </a:prstGeom>
-          <a:noFill/>
-        </p:spPr>
-        <p:txBody>
-          <a:bodyPr wrap="square" lIns="0" rIns="0" tIns="0" bIns="0" anchor="t">
-            <a:spAutoFit/>
-          </a:bodyPr>
-          <a:lstStyle/>
-          <a:p>
-            <a:pPr algn="l"/>
-            <a:r>
-              <a:rPr sz="900" b="1" i="0">
-                <a:solidFill>
-                  <a:srgbClr val="F2C55C"/>
-                </a:solidFill>
-                <a:latin typeface="Consolas"/>
-              </a:rPr>
-              <a:t>③</a:t>
-            </a:r>
-          </a:p>
-        </p:txBody>
-      </p:sp>
-      <p:sp>
-        <p:nvSpPr>
-          <p:cNvPr id="28" name="TextBox 27"/>
-          <p:cNvSpPr txBox="1"/>
-          <p:nvPr/>
-        </p:nvSpPr>
-        <p:spPr>
-          <a:xfrm>
-            <a:off x="2438400" y="276225"/>
-            <a:ext cx="647700" cy="133350"/>
-          </a:xfrm>
-          <a:prstGeom prst="rect">
-            <a:avLst/>
-          </a:prstGeom>
-          <a:noFill/>
-        </p:spPr>
-        <p:txBody>
-          <a:bodyPr wrap="square" lIns="0" rIns="0" tIns="0" bIns="0" anchor="t">
-            <a:spAutoFit/>
-          </a:bodyPr>
-          <a:lstStyle/>
-          <a:p>
-            <a:pPr algn="r"/>
-            <a:r>
-              <a:rPr sz="650" b="1" i="0">
-                <a:solidFill>
-                  <a:srgbClr val="F2C55C"/>
-                </a:solidFill>
-                <a:latin typeface="Microsoft YaHei"/>
-              </a:rPr>
-              <a:t>Compiler-as-Verifier</a:t>
-            </a:r>
-          </a:p>
-        </p:txBody>
-      </p:sp>
-      <p:sp>
-        <p:nvSpPr>
-          <p:cNvPr id="29" name="TextBox 28"/>
-          <p:cNvSpPr txBox="1"/>
-          <p:nvPr/>
-        </p:nvSpPr>
-        <p:spPr>
-          <a:xfrm>
-            <a:off x="2438400" y="438150"/>
-            <a:ext cx="647700" cy="361950"/>
-          </a:xfrm>
-          <a:prstGeom prst="rect">
-            <a:avLst/>
-          </a:prstGeom>
-          <a:noFill/>
-        </p:spPr>
-        <p:txBody>
-          <a:bodyPr wrap="square" lIns="0" rIns="0" tIns="0" bIns="0" anchor="t">
-            <a:spAutoFit/>
-          </a:bodyPr>
-          <a:lstStyle/>
-          <a:p>
-            <a:pPr algn="l"/>
-            <a:r>
-              <a:rPr sz="550" b="0" i="0">
-                <a:solidFill>
-                  <a:srgbClr val="9FB5C9"/>
-                </a:solidFill>
-                <a:latin typeface="Consolas"/>
-              </a:rPr>
-              <a:t>OpRegistry · Pass
-静态 / 数值 / 性能 三级验证</a:t>
-            </a:r>
-          </a:p>
-        </p:txBody>
-      </p:sp>
-      <p:sp>
-        <p:nvSpPr>
-          <p:cNvPr id="30" name="Right Arrow 29"/>
+          <p:cNvPr id="31" name="Rounded Rectangle 30"/>
           <p:cNvSpPr/>
           <p:nvPr/>
         </p:nvSpPr>
         <p:spPr>
           <a:xfrm>
-            <a:off x="3124200" y="495300"/>
-            <a:ext cx="76200" cy="76200"/>
-          </a:xfrm>
-          <a:prstGeom prst="rightArrow">
-            <a:avLst/>
+            <a:off x="4114800" y="304800"/>
+            <a:ext cx="1257300" cy="571500"/>
+          </a:xfrm>
+          <a:prstGeom prst="roundRect">
+            <a:avLst>
+              <a:gd name="adj" fmla="val 16000"/>
+            </a:avLst>
           </a:prstGeom>
           <a:solidFill>
-            <a:srgbClr val="9FB5C9"/>
+            <a:srgbClr val="183553"/>
           </a:solidFill>
-          <a:ln>
-            <a:noFill/>
+          <a:ln w="11430">
+            <a:solidFill>
+              <a:srgbClr val="EF6E6E"/>
+            </a:solidFill>
           </a:ln>
         </p:spPr>
         <p:style>
@@ -4244,27 +4276,23 @@
       </p:sp>
       <p:sp>
         <p:nvSpPr>
-          <p:cNvPr id="31" name="Rounded Rectangle 30"/>
+          <p:cNvPr id="32" name="Rectangle 31"/>
           <p:cNvSpPr/>
           <p:nvPr/>
         </p:nvSpPr>
         <p:spPr>
           <a:xfrm>
-            <a:off x="3200400" y="247650"/>
-            <a:ext cx="723900" cy="571500"/>
-          </a:xfrm>
-          <a:prstGeom prst="roundRect">
-            <a:avLst>
-              <a:gd name="adj" fmla="val 18000"/>
-            </a:avLst>
+            <a:off x="4114800" y="304800"/>
+            <a:ext cx="28575" cy="571500"/>
+          </a:xfrm>
+          <a:prstGeom prst="rect">
+            <a:avLst/>
           </a:prstGeom>
           <a:solidFill>
-            <a:srgbClr val="122A43"/>
+            <a:srgbClr val="EF6E6E"/>
           </a:solidFill>
-          <a:ln w="9525">
-            <a:solidFill>
-              <a:srgbClr val="B88AF0"/>
-            </a:solidFill>
+          <a:ln>
+            <a:noFill/>
           </a:ln>
         </p:spPr>
         <p:style>
@@ -4291,57 +4319,14 @@
       </p:sp>
       <p:sp>
         <p:nvSpPr>
-          <p:cNvPr id="32" name="Rectangle 31"/>
-          <p:cNvSpPr/>
-          <p:nvPr/>
-        </p:nvSpPr>
-        <p:spPr>
-          <a:xfrm>
-            <a:off x="3200400" y="247650"/>
-            <a:ext cx="28575" cy="571500"/>
-          </a:xfrm>
-          <a:prstGeom prst="rect">
-            <a:avLst/>
-          </a:prstGeom>
-          <a:solidFill>
-            <a:srgbClr val="B88AF0"/>
-          </a:solidFill>
-          <a:ln>
-            <a:noFill/>
-          </a:ln>
-        </p:spPr>
-        <p:style>
-          <a:lnRef idx="1">
-            <a:schemeClr val="accent1"/>
-          </a:lnRef>
-          <a:fillRef idx="3">
-            <a:schemeClr val="accent1"/>
-          </a:fillRef>
-          <a:effectRef idx="2">
-            <a:schemeClr val="accent1"/>
-          </a:effectRef>
-          <a:fontRef idx="minor">
-            <a:schemeClr val="lt1"/>
-          </a:fontRef>
-        </p:style>
-        <p:txBody>
-          <a:bodyPr rtlCol="0" anchor="ctr"/>
-          <a:lstStyle/>
-          <a:p>
-            <a:pPr algn="ctr"/>
-          </a:p>
-        </p:txBody>
-      </p:sp>
-      <p:sp>
-        <p:nvSpPr>
           <p:cNvPr id="33" name="TextBox 32"/>
           <p:cNvSpPr txBox="1"/>
           <p:nvPr/>
         </p:nvSpPr>
         <p:spPr>
           <a:xfrm>
-            <a:off x="3238500" y="276225"/>
-            <a:ext cx="133350" cy="133350"/>
+            <a:off x="4171950" y="333375"/>
+            <a:ext cx="152400" cy="133350"/>
           </a:xfrm>
           <a:prstGeom prst="rect">
             <a:avLst/>
@@ -4356,9 +4341,9 @@
           <a:p>
             <a:pPr algn="l"/>
             <a:r>
-              <a:rPr sz="900" b="1" i="0">
+              <a:rPr sz="1000" b="1" i="0">
                 <a:solidFill>
-                  <a:srgbClr val="B88AF0"/>
+                  <a:srgbClr val="EF6E6E"/>
                 </a:solidFill>
                 <a:latin typeface="Consolas"/>
               </a:rPr>
@@ -4375,8 +4360,8 @@
         </p:nvSpPr>
         <p:spPr>
           <a:xfrm>
-            <a:off x="3238500" y="276225"/>
-            <a:ext cx="647700" cy="133350"/>
+            <a:off x="4171950" y="342900"/>
+            <a:ext cx="1143000" cy="142875"/>
           </a:xfrm>
           <a:prstGeom prst="rect">
             <a:avLst/>
@@ -4391,13 +4376,13 @@
           <a:p>
             <a:pPr algn="r"/>
             <a:r>
-              <a:rPr sz="650" b="1" i="0">
+              <a:rPr sz="800" b="1" i="0">
                 <a:solidFill>
-                  <a:srgbClr val="B88AF0"/>
+                  <a:srgbClr val="EF6E6E"/>
                 </a:solidFill>
                 <a:latin typeface="Microsoft YaHei"/>
               </a:rPr>
-              <a:t>Agent Runtime</a:t>
+              <a:t>Multi-Hardware</a:t>
             </a:r>
           </a:p>
         </p:txBody>
@@ -4410,8 +4395,8 @@
         </p:nvSpPr>
         <p:spPr>
           <a:xfrm>
-            <a:off x="3238500" y="438150"/>
-            <a:ext cx="647700" cy="361950"/>
+            <a:off x="4191000" y="514350"/>
+            <a:ext cx="1123950" cy="133350"/>
           </a:xfrm>
           <a:prstGeom prst="rect">
             <a:avLst/>
@@ -4419,12 +4404,47 @@
           <a:noFill/>
         </p:spPr>
         <p:txBody>
-          <a:bodyPr wrap="square" lIns="0" rIns="0" tIns="0" bIns="0" anchor="t">
+          <a:bodyPr wrap="square" lIns="0" rIns="0" tIns="0" bIns="0" anchor="ctr">
             <a:spAutoFit/>
           </a:bodyPr>
           <a:lstStyle/>
           <a:p>
-            <a:pPr algn="l"/>
+            <a:pPr algn="ctr"/>
+            <a:r>
+              <a:rPr sz="600" b="1" i="0">
+                <a:solidFill>
+                  <a:srgbClr val="EAF2FA"/>
+                </a:solidFill>
+                <a:latin typeface="Consolas"/>
+              </a:rPr>
+              <a:t>NVIDIA · Ascend · AMD</a:t>
+            </a:r>
+          </a:p>
+        </p:txBody>
+      </p:sp>
+      <p:sp>
+        <p:nvSpPr>
+          <p:cNvPr id="36" name="TextBox 35"/>
+          <p:cNvSpPr txBox="1"/>
+          <p:nvPr/>
+        </p:nvSpPr>
+        <p:spPr>
+          <a:xfrm>
+            <a:off x="4191000" y="647700"/>
+            <a:ext cx="1123950" cy="190500"/>
+          </a:xfrm>
+          <a:prstGeom prst="rect">
+            <a:avLst/>
+          </a:prstGeom>
+          <a:noFill/>
+        </p:spPr>
+        <p:txBody>
+          <a:bodyPr wrap="square" lIns="0" rIns="0" tIns="0" bIns="0" anchor="ctr">
+            <a:spAutoFit/>
+          </a:bodyPr>
+          <a:lstStyle/>
+          <a:p>
+            <a:pPr algn="ctr"/>
             <a:r>
               <a:rPr sz="550" b="0" i="0">
                 <a:solidFill>
@@ -4432,155 +4452,21 @@
                 </a:solidFill>
                 <a:latin typeface="Consolas"/>
               </a:rPr>
-              <a:t>Bounded action · tool-use
-budget · checkpoint/rollback</a:t>
-            </a:r>
-          </a:p>
-        </p:txBody>
-      </p:sp>
-      <p:sp>
-        <p:nvSpPr>
-          <p:cNvPr id="36" name="Right Arrow 35"/>
-          <p:cNvSpPr/>
-          <p:nvPr/>
-        </p:nvSpPr>
-        <p:spPr>
-          <a:xfrm>
-            <a:off x="3924300" y="495300"/>
-            <a:ext cx="76200" cy="76200"/>
-          </a:xfrm>
-          <a:prstGeom prst="rightArrow">
-            <a:avLst/>
-          </a:prstGeom>
-          <a:solidFill>
-            <a:srgbClr val="9FB5C9"/>
-          </a:solidFill>
-          <a:ln>
-            <a:noFill/>
-          </a:ln>
-        </p:spPr>
-        <p:style>
-          <a:lnRef idx="1">
-            <a:schemeClr val="accent1"/>
-          </a:lnRef>
-          <a:fillRef idx="3">
-            <a:schemeClr val="accent1"/>
-          </a:fillRef>
-          <a:effectRef idx="2">
-            <a:schemeClr val="accent1"/>
-          </a:effectRef>
-          <a:fontRef idx="minor">
-            <a:schemeClr val="lt1"/>
-          </a:fontRef>
-        </p:style>
-        <p:txBody>
-          <a:bodyPr rtlCol="0" anchor="ctr"/>
-          <a:lstStyle/>
-          <a:p>
-            <a:pPr algn="ctr"/>
-          </a:p>
-        </p:txBody>
-      </p:sp>
-      <p:sp>
-        <p:nvSpPr>
-          <p:cNvPr id="37" name="Rounded Rectangle 36"/>
-          <p:cNvSpPr/>
-          <p:nvPr/>
-        </p:nvSpPr>
-        <p:spPr>
-          <a:xfrm>
-            <a:off x="4000500" y="247650"/>
-            <a:ext cx="723900" cy="571500"/>
-          </a:xfrm>
-          <a:prstGeom prst="roundRect">
-            <a:avLst>
-              <a:gd name="adj" fmla="val 18000"/>
-            </a:avLst>
-          </a:prstGeom>
-          <a:solidFill>
-            <a:srgbClr val="183553"/>
-          </a:solidFill>
-          <a:ln w="9525">
-            <a:solidFill>
-              <a:srgbClr val="F2C55C"/>
-            </a:solidFill>
-          </a:ln>
-        </p:spPr>
-        <p:style>
-          <a:lnRef idx="1">
-            <a:schemeClr val="accent1"/>
-          </a:lnRef>
-          <a:fillRef idx="3">
-            <a:schemeClr val="accent1"/>
-          </a:fillRef>
-          <a:effectRef idx="2">
-            <a:schemeClr val="accent1"/>
-          </a:effectRef>
-          <a:fontRef idx="minor">
-            <a:schemeClr val="lt1"/>
-          </a:fontRef>
-        </p:style>
-        <p:txBody>
-          <a:bodyPr rtlCol="0" anchor="ctr"/>
-          <a:lstStyle/>
-          <a:p>
-            <a:pPr algn="ctr"/>
-          </a:p>
-        </p:txBody>
-      </p:sp>
-      <p:sp>
-        <p:nvSpPr>
-          <p:cNvPr id="38" name="Rectangle 37"/>
-          <p:cNvSpPr/>
-          <p:nvPr/>
-        </p:nvSpPr>
-        <p:spPr>
-          <a:xfrm>
-            <a:off x="4000500" y="247650"/>
-            <a:ext cx="28575" cy="571500"/>
-          </a:xfrm>
-          <a:prstGeom prst="rect">
-            <a:avLst/>
-          </a:prstGeom>
-          <a:solidFill>
-            <a:srgbClr val="F2C55C"/>
-          </a:solidFill>
-          <a:ln>
-            <a:noFill/>
-          </a:ln>
-        </p:spPr>
-        <p:style>
-          <a:lnRef idx="1">
-            <a:schemeClr val="accent1"/>
-          </a:lnRef>
-          <a:fillRef idx="3">
-            <a:schemeClr val="accent1"/>
-          </a:fillRef>
-          <a:effectRef idx="2">
-            <a:schemeClr val="accent1"/>
-          </a:effectRef>
-          <a:fontRef idx="minor">
-            <a:schemeClr val="lt1"/>
-          </a:fontRef>
-        </p:style>
-        <p:txBody>
-          <a:bodyPr rtlCol="0" anchor="ctr"/>
-          <a:lstStyle/>
-          <a:p>
-            <a:pPr algn="ctr"/>
-          </a:p>
-        </p:txBody>
-      </p:sp>
-      <p:sp>
-        <p:nvSpPr>
-          <p:cNvPr id="39" name="TextBox 38"/>
+              <a:t>→ 多 NPU / DSA</a:t>
+            </a:r>
+          </a:p>
+        </p:txBody>
+      </p:sp>
+      <p:sp>
+        <p:nvSpPr>
+          <p:cNvPr id="37" name="TextBox 36"/>
           <p:cNvSpPr txBox="1"/>
           <p:nvPr/>
         </p:nvSpPr>
         <p:spPr>
           <a:xfrm>
-            <a:off x="4038600" y="276225"/>
-            <a:ext cx="133350" cy="133350"/>
+            <a:off x="76200" y="914400"/>
+            <a:ext cx="5334000" cy="104775"/>
           </a:xfrm>
           <a:prstGeom prst="rect">
             <a:avLst/>
@@ -4588,351 +4474,6 @@
           <a:noFill/>
         </p:spPr>
         <p:txBody>
-          <a:bodyPr wrap="square" lIns="0" rIns="0" tIns="0" bIns="0" anchor="t">
-            <a:spAutoFit/>
-          </a:bodyPr>
-          <a:lstStyle/>
-          <a:p>
-            <a:pPr algn="l"/>
-            <a:r>
-              <a:rPr sz="900" b="1" i="0">
-                <a:solidFill>
-                  <a:srgbClr val="F2C55C"/>
-                </a:solidFill>
-                <a:latin typeface="Consolas"/>
-              </a:rPr>
-              <a:t>⑤</a:t>
-            </a:r>
-          </a:p>
-        </p:txBody>
-      </p:sp>
-      <p:sp>
-        <p:nvSpPr>
-          <p:cNvPr id="40" name="TextBox 39"/>
-          <p:cNvSpPr txBox="1"/>
-          <p:nvPr/>
-        </p:nvSpPr>
-        <p:spPr>
-          <a:xfrm>
-            <a:off x="4038600" y="276225"/>
-            <a:ext cx="647700" cy="133350"/>
-          </a:xfrm>
-          <a:prstGeom prst="rect">
-            <a:avLst/>
-          </a:prstGeom>
-          <a:noFill/>
-        </p:spPr>
-        <p:txBody>
-          <a:bodyPr wrap="square" lIns="0" rIns="0" tIns="0" bIns="0" anchor="t">
-            <a:spAutoFit/>
-          </a:bodyPr>
-          <a:lstStyle/>
-          <a:p>
-            <a:pPr algn="r"/>
-            <a:r>
-              <a:rPr sz="650" b="1" i="0">
-                <a:solidFill>
-                  <a:srgbClr val="F2C55C"/>
-                </a:solidFill>
-                <a:latin typeface="Microsoft YaHei"/>
-              </a:rPr>
-              <a:t>Benchmark</a:t>
-            </a:r>
-          </a:p>
-        </p:txBody>
-      </p:sp>
-      <p:sp>
-        <p:nvSpPr>
-          <p:cNvPr id="41" name="TextBox 40"/>
-          <p:cNvSpPr txBox="1"/>
-          <p:nvPr/>
-        </p:nvSpPr>
-        <p:spPr>
-          <a:xfrm>
-            <a:off x="4038600" y="438150"/>
-            <a:ext cx="647700" cy="361950"/>
-          </a:xfrm>
-          <a:prstGeom prst="rect">
-            <a:avLst/>
-          </a:prstGeom>
-          <a:noFill/>
-        </p:spPr>
-        <p:txBody>
-          <a:bodyPr wrap="square" lIns="0" rIns="0" tIns="0" bIns="0" anchor="t">
-            <a:spAutoFit/>
-          </a:bodyPr>
-          <a:lstStyle/>
-          <a:p>
-            <a:pPr algn="l"/>
-            <a:r>
-              <a:rPr sz="550" b="0" i="0">
-                <a:solidFill>
-                  <a:srgbClr val="9FB5C9"/>
-                </a:solidFill>
-                <a:latin typeface="Consolas"/>
-              </a:rPr>
-              <a:t>BL × OT × ST × L · 6 baselines
-45 ops · ~350 shapes</a:t>
-            </a:r>
-          </a:p>
-        </p:txBody>
-      </p:sp>
-      <p:sp>
-        <p:nvSpPr>
-          <p:cNvPr id="42" name="Right Arrow 41"/>
-          <p:cNvSpPr/>
-          <p:nvPr/>
-        </p:nvSpPr>
-        <p:spPr>
-          <a:xfrm>
-            <a:off x="4724400" y="495300"/>
-            <a:ext cx="76200" cy="76200"/>
-          </a:xfrm>
-          <a:prstGeom prst="rightArrow">
-            <a:avLst/>
-          </a:prstGeom>
-          <a:solidFill>
-            <a:srgbClr val="9FB5C9"/>
-          </a:solidFill>
-          <a:ln>
-            <a:noFill/>
-          </a:ln>
-        </p:spPr>
-        <p:style>
-          <a:lnRef idx="1">
-            <a:schemeClr val="accent1"/>
-          </a:lnRef>
-          <a:fillRef idx="3">
-            <a:schemeClr val="accent1"/>
-          </a:fillRef>
-          <a:effectRef idx="2">
-            <a:schemeClr val="accent1"/>
-          </a:effectRef>
-          <a:fontRef idx="minor">
-            <a:schemeClr val="lt1"/>
-          </a:fontRef>
-        </p:style>
-        <p:txBody>
-          <a:bodyPr rtlCol="0" anchor="ctr"/>
-          <a:lstStyle/>
-          <a:p>
-            <a:pPr algn="ctr"/>
-          </a:p>
-        </p:txBody>
-      </p:sp>
-      <p:sp>
-        <p:nvSpPr>
-          <p:cNvPr id="43" name="Rounded Rectangle 42"/>
-          <p:cNvSpPr/>
-          <p:nvPr/>
-        </p:nvSpPr>
-        <p:spPr>
-          <a:xfrm>
-            <a:off x="4800600" y="247650"/>
-            <a:ext cx="571500" cy="571500"/>
-          </a:xfrm>
-          <a:prstGeom prst="roundRect">
-            <a:avLst>
-              <a:gd name="adj" fmla="val 18000"/>
-            </a:avLst>
-          </a:prstGeom>
-          <a:solidFill>
-            <a:srgbClr val="183553"/>
-          </a:solidFill>
-          <a:ln w="9525">
-            <a:solidFill>
-              <a:srgbClr val="EF6E6E"/>
-            </a:solidFill>
-          </a:ln>
-        </p:spPr>
-        <p:style>
-          <a:lnRef idx="1">
-            <a:schemeClr val="accent1"/>
-          </a:lnRef>
-          <a:fillRef idx="3">
-            <a:schemeClr val="accent1"/>
-          </a:fillRef>
-          <a:effectRef idx="2">
-            <a:schemeClr val="accent1"/>
-          </a:effectRef>
-          <a:fontRef idx="minor">
-            <a:schemeClr val="lt1"/>
-          </a:fontRef>
-        </p:style>
-        <p:txBody>
-          <a:bodyPr rtlCol="0" anchor="ctr"/>
-          <a:lstStyle/>
-          <a:p>
-            <a:pPr algn="ctr"/>
-          </a:p>
-        </p:txBody>
-      </p:sp>
-      <p:sp>
-        <p:nvSpPr>
-          <p:cNvPr id="44" name="Rectangle 43"/>
-          <p:cNvSpPr/>
-          <p:nvPr/>
-        </p:nvSpPr>
-        <p:spPr>
-          <a:xfrm>
-            <a:off x="4800600" y="247650"/>
-            <a:ext cx="28575" cy="571500"/>
-          </a:xfrm>
-          <a:prstGeom prst="rect">
-            <a:avLst/>
-          </a:prstGeom>
-          <a:solidFill>
-            <a:srgbClr val="EF6E6E"/>
-          </a:solidFill>
-          <a:ln>
-            <a:noFill/>
-          </a:ln>
-        </p:spPr>
-        <p:style>
-          <a:lnRef idx="1">
-            <a:schemeClr val="accent1"/>
-          </a:lnRef>
-          <a:fillRef idx="3">
-            <a:schemeClr val="accent1"/>
-          </a:fillRef>
-          <a:effectRef idx="2">
-            <a:schemeClr val="accent1"/>
-          </a:effectRef>
-          <a:fontRef idx="minor">
-            <a:schemeClr val="lt1"/>
-          </a:fontRef>
-        </p:style>
-        <p:txBody>
-          <a:bodyPr rtlCol="0" anchor="ctr"/>
-          <a:lstStyle/>
-          <a:p>
-            <a:pPr algn="ctr"/>
-          </a:p>
-        </p:txBody>
-      </p:sp>
-      <p:sp>
-        <p:nvSpPr>
-          <p:cNvPr id="45" name="TextBox 44"/>
-          <p:cNvSpPr txBox="1"/>
-          <p:nvPr/>
-        </p:nvSpPr>
-        <p:spPr>
-          <a:xfrm>
-            <a:off x="4838700" y="276225"/>
-            <a:ext cx="133350" cy="133350"/>
-          </a:xfrm>
-          <a:prstGeom prst="rect">
-            <a:avLst/>
-          </a:prstGeom>
-          <a:noFill/>
-        </p:spPr>
-        <p:txBody>
-          <a:bodyPr wrap="square" lIns="0" rIns="0" tIns="0" bIns="0" anchor="t">
-            <a:spAutoFit/>
-          </a:bodyPr>
-          <a:lstStyle/>
-          <a:p>
-            <a:pPr algn="l"/>
-            <a:r>
-              <a:rPr sz="900" b="1" i="0">
-                <a:solidFill>
-                  <a:srgbClr val="EF6E6E"/>
-                </a:solidFill>
-                <a:latin typeface="Consolas"/>
-              </a:rPr>
-              <a:t>▶</a:t>
-            </a:r>
-          </a:p>
-        </p:txBody>
-      </p:sp>
-      <p:sp>
-        <p:nvSpPr>
-          <p:cNvPr id="46" name="TextBox 45"/>
-          <p:cNvSpPr txBox="1"/>
-          <p:nvPr/>
-        </p:nvSpPr>
-        <p:spPr>
-          <a:xfrm>
-            <a:off x="4838700" y="276225"/>
-            <a:ext cx="495300" cy="133350"/>
-          </a:xfrm>
-          <a:prstGeom prst="rect">
-            <a:avLst/>
-          </a:prstGeom>
-          <a:noFill/>
-        </p:spPr>
-        <p:txBody>
-          <a:bodyPr wrap="square" lIns="0" rIns="0" tIns="0" bIns="0" anchor="t">
-            <a:spAutoFit/>
-          </a:bodyPr>
-          <a:lstStyle/>
-          <a:p>
-            <a:pPr algn="r"/>
-            <a:r>
-              <a:rPr sz="650" b="1" i="0">
-                <a:solidFill>
-                  <a:srgbClr val="EF6E6E"/>
-                </a:solidFill>
-                <a:latin typeface="Microsoft YaHei"/>
-              </a:rPr>
-              <a:t>Hardware</a:t>
-            </a:r>
-          </a:p>
-        </p:txBody>
-      </p:sp>
-      <p:sp>
-        <p:nvSpPr>
-          <p:cNvPr id="47" name="TextBox 46"/>
-          <p:cNvSpPr txBox="1"/>
-          <p:nvPr/>
-        </p:nvSpPr>
-        <p:spPr>
-          <a:xfrm>
-            <a:off x="4838700" y="438150"/>
-            <a:ext cx="495300" cy="361950"/>
-          </a:xfrm>
-          <a:prstGeom prst="rect">
-            <a:avLst/>
-          </a:prstGeom>
-          <a:noFill/>
-        </p:spPr>
-        <p:txBody>
-          <a:bodyPr wrap="square" lIns="0" rIns="0" tIns="0" bIns="0" anchor="t">
-            <a:spAutoFit/>
-          </a:bodyPr>
-          <a:lstStyle/>
-          <a:p>
-            <a:pPr algn="l"/>
-            <a:r>
-              <a:rPr sz="550" b="0" i="0">
-                <a:solidFill>
-                  <a:srgbClr val="9FB5C9"/>
-                </a:solidFill>
-                <a:latin typeface="Consolas"/>
-              </a:rPr>
-              <a:t>NVIDIA · Ascend · AMD
-→ 多 NPU / DSA</a:t>
-            </a:r>
-          </a:p>
-        </p:txBody>
-      </p:sp>
-      <p:sp>
-        <p:nvSpPr>
-          <p:cNvPr id="48" name="TextBox 47"/>
-          <p:cNvSpPr txBox="1"/>
-          <p:nvPr/>
-        </p:nvSpPr>
-        <p:spPr>
-          <a:xfrm>
-            <a:off x="76200" y="857250"/>
-            <a:ext cx="5334000" cy="114300"/>
-          </a:xfrm>
-          <a:prstGeom prst="rect">
-            <a:avLst/>
-          </a:prstGeom>
-          <a:noFill/>
-        </p:spPr>
-        <p:txBody>
           <a:bodyPr wrap="square" lIns="0" rIns="0" tIns="0" bIns="0" anchor="ctr">
             <a:spAutoFit/>
           </a:bodyPr>
@@ -4940,27 +4481,27 @@
           <a:p>
             <a:pPr algn="ctr"/>
             <a:r>
-              <a:rPr sz="600" b="1" i="0">
+              <a:rPr sz="620" b="1" i="0">
                 <a:solidFill>
                   <a:srgbClr val="EAF2FA"/>
                 </a:solidFill>
                 <a:latin typeface="Microsoft YaHei"/>
               </a:rPr>
-              <a:t>解决场景： LLM 驱动 kernel 生成 / 优化  ·  跨硬件统一表达 (SIMT ↔ SIMD ↔ NPU)  ·  最小 token 预算下达到厂商库级性能</a:t>
-            </a:r>
-          </a:p>
-        </p:txBody>
-      </p:sp>
-      <p:sp>
-        <p:nvSpPr>
-          <p:cNvPr id="49" name="TextBox 48"/>
+              <a:t>解决场景  ·  LLM 驱动 kernel 生成 / 优化  ·  跨硬件统一表达 (SIMT ↔ SIMD ↔ NPU)  ·  最小 token 预算下逼近厂商库性能</a:t>
+            </a:r>
+          </a:p>
+        </p:txBody>
+      </p:sp>
+      <p:sp>
+        <p:nvSpPr>
+          <p:cNvPr id="38" name="TextBox 37"/>
           <p:cNvSpPr txBox="1"/>
           <p:nvPr/>
         </p:nvSpPr>
         <p:spPr>
           <a:xfrm>
-            <a:off x="76200" y="962025"/>
-            <a:ext cx="5334000" cy="104775"/>
+            <a:off x="76200" y="1019175"/>
+            <a:ext cx="5334000" cy="95250"/>
           </a:xfrm>
           <a:prstGeom prst="rect">
             <a:avLst/>
@@ -4977,11 +4518,11 @@
             <a:r>
               <a:rPr sz="550" b="0" i="1">
                 <a:solidFill>
-                  <a:srgbClr val="6E869F"/>
+                  <a:srgbClr val="38D1B8"/>
                 </a:solidFill>
-                <a:latin typeface="Microsoft YaHei"/>
+                <a:latin typeface="Consolas"/>
               </a:rPr>
-              <a:t>技术主张： 语义 / 策略分离  ·  有界动作空间  ·  多层 IR + 多级验证  ·  硬件信号闭环  ·  结构化经验沉淀  ·  可复现评测</a:t>
+              <a:t>LLM-Native  =  bounded action  +  rationale  +  multi-level gates  +  hw-signal closed loop</a:t>
             </a:r>
           </a:p>
         </p:txBody>
